--- a/fixtures/manual-check/deck.pptx
+++ b/fixtures/manual-check/deck.pptx
@@ -4,14 +4,192 @@
   <p:sldMasterIdLst>
     <p:sldMasterId xmlns:r="http://schemas.openxmlformats.org/officeDocument/2006/relationships" id="2147483648" r:id="rId1"/>
   </p:sldMasterIdLst>
+  <p:notesMasterIdLst>
+    <p:notesMasterId r:id="Rf3aa8718d28243fc"/>
+  </p:notesMasterIdLst>
   <p:sldIdLst>
     <p:sldId xmlns:r="http://schemas.openxmlformats.org/officeDocument/2006/relationships" id="256" r:id="rId2"/>
-    <p:sldId id="257" r:id="R109b600dcb8546b1"/>
   </p:sldIdLst>
   <p:sldSz cx="12192000" cy="6858000"/>
   <p:notesSz cx="6858000" cy="9144000"/>
   <p:defaultTextStyle/>
 </p:presentation>
+</file>
+
+<file path=ppt/notesMasters/notesMaster1.xml><?xml version="1.0" encoding="utf-8"?>
+<p:notesMaster xmlns:p="http://schemas.openxmlformats.org/presentationml/2006/main">
+  <p:cSld>
+    <p:spTree>
+      <p:nvGrpSpPr>
+        <p:cNvPr id="1" name=""/>
+        <p:cNvGrpSpPr/>
+        <p:nvPr/>
+      </p:nvGrpSpPr>
+      <p:grpSpPr>
+        <a:xfrm xmlns:a="http://schemas.openxmlformats.org/drawingml/2006/main"/>
+      </p:grpSpPr>
+    </p:spTree>
+  </p:cSld>
+  <p:clrMap bg1="lt1" tx1="dk1" bg2="lt2" tx2="dk2" accent1="accent1" accent2="accent2" accent3="accent3" accent4="accent4" accent5="accent5" accent6="accent6" hlink="hlink" folHlink="folHlink"/>
+  <p:notesStyle/>
+</p:notesMaster>
+</file>
+
+<file path=ppt/notesMasters/theme/theme2.xml><?xml version="1.0" encoding="utf-8"?>
+<a:theme xmlns:a="http://schemas.openxmlformats.org/drawingml/2006/main" name="AIOffice">
+  <a:themeElements>
+    <a:clrScheme name="AIOffice">
+      <a:dk1>
+        <a:sysClr val="windowText" lastClr="000000"/>
+      </a:dk1>
+      <a:lt1>
+        <a:sysClr val="window" lastClr="FFFFFF"/>
+      </a:lt1>
+      <a:dk2>
+        <a:srgbClr val="44546A"/>
+      </a:dk2>
+      <a:lt2>
+        <a:srgbClr val="E7E6E6"/>
+      </a:lt2>
+      <a:accent1>
+        <a:srgbClr val="4472C4"/>
+      </a:accent1>
+      <a:accent2>
+        <a:srgbClr val="ED7D31"/>
+      </a:accent2>
+      <a:accent3>
+        <a:srgbClr val="A5A5A5"/>
+      </a:accent3>
+      <a:accent4>
+        <a:srgbClr val="FFC000"/>
+      </a:accent4>
+      <a:accent5>
+        <a:srgbClr val="5B9BD5"/>
+      </a:accent5>
+      <a:accent6>
+        <a:srgbClr val="70AD47"/>
+      </a:accent6>
+      <a:hlink>
+        <a:srgbClr val="0563C1"/>
+      </a:hlink>
+      <a:folHlink>
+        <a:srgbClr val="954F72"/>
+      </a:folHlink>
+    </a:clrScheme>
+    <a:fontScheme name="AIOffice">
+      <a:majorFont>
+        <a:latin typeface="Calibri Light"/>
+        <a:ea typeface=""/>
+        <a:cs typeface=""/>
+      </a:majorFont>
+      <a:minorFont>
+        <a:latin typeface="Calibri"/>
+        <a:ea typeface=""/>
+        <a:cs typeface=""/>
+      </a:minorFont>
+    </a:fontScheme>
+    <a:fmtScheme name="AIOffice">
+      <a:fillStyleLst>
+        <a:solidFill>
+          <a:schemeClr val="phClr"/>
+        </a:solidFill>
+        <a:solidFill>
+          <a:schemeClr val="phClr"/>
+        </a:solidFill>
+        <a:solidFill>
+          <a:schemeClr val="phClr"/>
+        </a:solidFill>
+      </a:fillStyleLst>
+      <a:lnStyleLst>
+        <a:ln w="9525">
+          <a:solidFill>
+            <a:schemeClr val="phClr"/>
+          </a:solidFill>
+        </a:ln>
+        <a:ln w="9525">
+          <a:solidFill>
+            <a:schemeClr val="phClr"/>
+          </a:solidFill>
+        </a:ln>
+        <a:ln w="9525">
+          <a:solidFill>
+            <a:schemeClr val="phClr"/>
+          </a:solidFill>
+        </a:ln>
+      </a:lnStyleLst>
+      <a:effectStyleLst>
+        <a:effectStyle>
+          <a:effectLst/>
+        </a:effectStyle>
+        <a:effectStyle>
+          <a:effectLst/>
+        </a:effectStyle>
+        <a:effectStyle>
+          <a:effectLst/>
+        </a:effectStyle>
+      </a:effectStyleLst>
+      <a:bgFillStyleLst>
+        <a:solidFill>
+          <a:schemeClr val="phClr"/>
+        </a:solidFill>
+        <a:solidFill>
+          <a:schemeClr val="phClr"/>
+        </a:solidFill>
+        <a:solidFill>
+          <a:schemeClr val="phClr"/>
+        </a:solidFill>
+      </a:bgFillStyleLst>
+    </a:fmtScheme>
+  </a:themeElements>
+</a:theme>
+</file>
+
+<file path=ppt/notesSlides/notesSlide1.xml><?xml version="1.0" encoding="utf-8"?>
+<p:notes xmlns:p="http://schemas.openxmlformats.org/presentationml/2006/main">
+  <p:cSld>
+    <p:spTree>
+      <p:nvGrpSpPr>
+        <p:cNvPr id="1" name=""/>
+        <p:cNvGrpSpPr/>
+        <p:nvPr/>
+      </p:nvGrpSpPr>
+      <p:grpSpPr>
+        <a:xfrm xmlns:a="http://schemas.openxmlformats.org/drawingml/2006/main"/>
+      </p:grpSpPr>
+      <p:sp>
+        <p:nvSpPr>
+          <p:cNvPr id="2" name="Notes Placeholder"/>
+          <p:cNvSpPr>
+            <a:spLocks xmlns:a="http://schemas.openxmlformats.org/drawingml/2006/main" noGrp="1"/>
+          </p:cNvSpPr>
+          <p:nvPr>
+            <p:ph type="body" idx="1"/>
+          </p:nvPr>
+        </p:nvSpPr>
+        <p:spPr/>
+        <p:txBody>
+          <a:bodyPr xmlns:a="http://schemas.openxmlformats.org/drawingml/2006/main"/>
+          <a:lstStyle xmlns:a="http://schemas.openxmlformats.org/drawingml/2006/main"/>
+          <a:p xmlns:a="http://schemas.openxmlformats.org/drawingml/2006/main">
+            <a:r>
+              <a:rPr lang="en-US"/>
+              <a:t>Speaker notes written by aioffice.</a:t>
+            </a:r>
+          </a:p>
+          <a:p xmlns:a="http://schemas.openxmlformats.org/drawingml/2006/main">
+            <a:r>
+              <a:rPr lang="en-US"/>
+              <a:t>Check: dark background, white title, embedded image.</a:t>
+            </a:r>
+          </a:p>
+        </p:txBody>
+      </p:sp>
+    </p:spTree>
+  </p:cSld>
+  <p:clrMapOvr>
+    <a:masterClrMapping xmlns:a="http://schemas.openxmlformats.org/drawingml/2006/main"/>
+  </p:clrMapOvr>
+</p:notes>
 </file>
 
 <file path=ppt/slideLayouts/slideLayout1.xml><?xml version="1.0" encoding="utf-8"?>
@@ -167,52 +345,14 @@
 <file path=ppt/slides/slide1.xml><?xml version="1.0" encoding="utf-8"?>
 <p:sld xmlns:a="http://schemas.openxmlformats.org/drawingml/2006/main" xmlns:p="http://schemas.openxmlformats.org/presentationml/2006/main">
   <p:cSld>
-    <p:spTree>
-      <p:nvGrpSpPr>
-        <p:cNvPr id="1" name=""/>
-        <p:cNvGrpSpPr/>
-        <p:nvPr/>
-      </p:nvGrpSpPr>
-      <p:grpSpPr>
-        <a:xfrm xmlns:a="http://schemas.openxmlformats.org/drawingml/2006/main"/>
-      </p:grpSpPr>
-      <p:sp>
-        <p:nvSpPr>
-          <p:cNvPr id="2" name="TextBox 2"/>
-          <p:cNvSpPr txBox="1"/>
-          <p:nvPr/>
-        </p:nvSpPr>
-        <p:spPr>
-          <a:xfrm>
-            <a:off x="720000" y="1080000"/>
-            <a:ext cx="3600000" cy="720000"/>
-          </a:xfrm>
-          <a:prstGeom prst="rect">
-            <a:avLst/>
-          </a:prstGeom>
-        </p:spPr>
-        <p:txBody>
-          <a:bodyPr wrap="square"/>
-          <a:lstStyle/>
-          <a:p>
-            <a:r>
-              <a:rPr lang="en-US"/>
-              <a:t>AIOffice</a:t>
-            </a:r>
-          </a:p>
-        </p:txBody>
-      </p:sp>
-    </p:spTree>
-  </p:cSld>
-  <p:clrMapOvr>
-    <a:masterClrMapping xmlns:a="http://schemas.openxmlformats.org/drawingml/2006/main"/>
-  </p:clrMapOvr>
-</p:sld>
-</file>
-
-<file path=ppt/slides/slide2.xml><?xml version="1.0" encoding="utf-8"?>
-<p:sld xmlns:p="http://schemas.openxmlformats.org/presentationml/2006/main">
-  <p:cSld>
+    <p:bg>
+      <p:bgPr>
+        <a:solidFill>
+          <a:srgbClr val="0F172A"/>
+        </a:solidFill>
+        <a:effectLst/>
+      </p:bgPr>
+    </p:bg>
     <p:spTree>
       <p:nvGrpSpPr>
         <p:cNvPr id="1" name=""/>
@@ -246,12 +386,40 @@
           <a:lstStyle xmlns:a="http://schemas.openxmlformats.org/drawingml/2006/main"/>
           <a:p xmlns:a="http://schemas.openxmlformats.org/drawingml/2006/main">
             <a:r>
-              <a:rPr lang="en-US" sz="4000"/>
-              <a:t>Hello</a:t>
+              <a:rPr lang="en-US" sz="4000">
+                <a:solidFill>
+                  <a:srgbClr val="FFFFFF"/>
+                </a:solidFill>
+              </a:rPr>
+              <a:t>AIOffice M2 Deck</a:t>
             </a:r>
           </a:p>
         </p:txBody>
       </p:sp>
+      <p:pic>
+        <p:nvPicPr>
+          <p:cNvPr id="3" name="deck-logo.png"/>
+          <p:cNvPicPr>
+            <a:picLocks noChangeAspect="1"/>
+          </p:cNvPicPr>
+          <p:nvPr/>
+        </p:nvPicPr>
+        <p:blipFill>
+          <a:blip xmlns:r="http://schemas.openxmlformats.org/officeDocument/2006/relationships" r:embed="R0b5b54926a6e4f13"/>
+          <a:stretch>
+            <a:fillRect/>
+          </a:stretch>
+        </p:blipFill>
+        <p:spPr>
+          <a:xfrm>
+            <a:off x="720000" y="2880000"/>
+            <a:ext cx="3240000" cy="1822500"/>
+          </a:xfrm>
+          <a:prstGeom prst="rect">
+            <a:avLst/>
+          </a:prstGeom>
+        </p:spPr>
+      </p:pic>
     </p:spTree>
   </p:cSld>
   <p:clrMapOvr>

--- a/fixtures/manual-check/deck.pptx
+++ b/fixtures/manual-check/deck.pptx
@@ -1,41 +1,20 @@
 
 <file path=ppt/presentation.xml><?xml version="1.0" encoding="utf-8"?>
-<p:presentation xmlns:p14="http://schemas.microsoft.com/office/powerpoint/2010/main" xmlns:r="http://schemas.openxmlformats.org/officeDocument/2006/relationships" xmlns:p="http://schemas.openxmlformats.org/presentationml/2006/main">
+<p:presentation xmlns:r="http://schemas.openxmlformats.org/officeDocument/2006/relationships" xmlns:p="http://schemas.openxmlformats.org/presentationml/2006/main">
   <p:sldMasterIdLst>
     <p:sldMasterId xmlns:r="http://schemas.openxmlformats.org/officeDocument/2006/relationships" id="2147483648" r:id="rId1"/>
   </p:sldMasterIdLst>
   <p:sldIdLst>
-    <p:sldId id="257" r:id="R540342f413b34f6e"/>
-    <p:sldId id="258" r:id="R12f0f41fc5fe4e7d"/>
-    <p:sldId id="259" r:id="R91da33eb355e42b5"/>
     <p:sldId xmlns:r="http://schemas.openxmlformats.org/officeDocument/2006/relationships" id="256" r:id="rId2"/>
   </p:sldIdLst>
-  <p:sldSz cx="9144000" cy="6858000" type="screen4x3"/>
+  <p:sldSz cx="12192000" cy="6858000"/>
   <p:notesSz cx="6858000" cy="9144000"/>
   <p:defaultTextStyle/>
-  <p:extLst>
-    <p:ext uri="{521415D9-36F7-43E2-AB2F-B90AF26B5E84}">
-      <p14:sectionLst xmlns:p14="http://schemas.microsoft.com/office/powerpoint/2010/main">
-        <p14:section name="Intro" id="{4E949336-902C-4BCE-838C-8AB502481BE2}">
-          <p14:sldIdLst>
-            <p14:sldId id="257"/>
-          </p14:sldIdLst>
-        </p14:section>
-        <p14:section name="Body" id="{C2836706-0E53-4F3D-9D48-CB392C901D4F}">
-          <p14:sldIdLst>
-            <p14:sldId id="258"/>
-            <p14:sldId id="259"/>
-            <p14:sldId id="256"/>
-          </p14:sldIdLst>
-        </p14:section>
-      </p14:sectionLst>
-    </p:ext>
-  </p:extLst>
 </p:presentation>
 </file>
 
 <file path=ppt/slideLayouts/slideLayout1.xml><?xml version="1.0" encoding="utf-8"?>
-<p:sldLayout xmlns:a="http://schemas.openxmlformats.org/drawingml/2006/main" xmlns:p="http://schemas.openxmlformats.org/presentationml/2006/main" type="blank">
+<p:sldLayout xmlns:p="http://schemas.openxmlformats.org/presentationml/2006/main" type="blank">
   <p:cSld name="Blank">
     <p:spTree>
       <p:nvGrpSpPr>
@@ -54,37 +33,9 @@
 </p:sldLayout>
 </file>
 
-<file path=ppt/slideLayouts/slideLayouts/slideLayout2.xml><?xml version="1.0" encoding="utf-8"?>
-<p:sldLayout xmlns:a="http://schemas.openxmlformats.org/drawingml/2006/main" xmlns:p="http://schemas.openxmlformats.org/presentationml/2006/main" type="blank">
-  <p:cSld name="M6 Section Layout">
-    <p:spTree>
-      <p:nvGrpSpPr>
-        <p:cNvPr id="1" name=""/>
-        <p:cNvGrpSpPr/>
-        <p:nvPr/>
-      </p:nvGrpSpPr>
-      <p:grpSpPr>
-        <a:xfrm xmlns:a="http://schemas.openxmlformats.org/drawingml/2006/main"/>
-      </p:grpSpPr>
-    </p:spTree>
-  </p:cSld>
-  <p:clrMapOvr>
-    <a:masterClrMapping xmlns:a="http://schemas.openxmlformats.org/drawingml/2006/main"/>
-  </p:clrMapOvr>
-</p:sldLayout>
-</file>
-
 <file path=ppt/slideLayouts/slideMasters/slideMaster1.xml><?xml version="1.0" encoding="utf-8"?>
-<p:sldMaster xmlns:a="http://schemas.openxmlformats.org/drawingml/2006/main" xmlns:r="http://schemas.openxmlformats.org/officeDocument/2006/relationships" xmlns:p="http://schemas.openxmlformats.org/presentationml/2006/main">
+<p:sldMaster xmlns:p="http://schemas.openxmlformats.org/presentationml/2006/main">
   <p:cSld>
-    <p:bg>
-      <p:bgPr>
-        <a:solidFill>
-          <a:srgbClr val="0F172A"/>
-        </a:solidFill>
-        <a:effectLst/>
-      </p:bgPr>
-    </p:bg>
     <p:spTree>
       <p:nvGrpSpPr>
         <p:cNvPr id="1" name=""/>
@@ -99,7 +50,6 @@
   <p:clrMap bg1="lt1" tx1="dk1" bg2="lt2" tx2="dk2" accent1="accent1" accent2="accent2" accent3="accent3" accent4="accent4" accent5="accent5" accent6="accent6" hlink="hlink" folHlink="folHlink"/>
   <p:sldLayoutIdLst>
     <p:sldLayoutId xmlns:r="http://schemas.openxmlformats.org/officeDocument/2006/relationships" id="2147483649" r:id="rId1"/>
-    <p:sldLayoutId id="2147483650" r:id="Rd4db7397cb1b4683"/>
   </p:sldLayoutIdLst>
 </p:sldMaster>
 </file>
@@ -121,7 +71,7 @@
         <a:srgbClr val="E7E6E6"/>
       </a:lt2>
       <a:accent1>
-        <a:srgbClr val="38BDF8"/>
+        <a:srgbClr val="4472C4"/>
       </a:accent1>
       <a:accent2>
         <a:srgbClr val="ED7D31"/>
@@ -214,7 +164,7 @@
 </file>
 
 <file path=ppt/slides/slide1.xml><?xml version="1.0" encoding="utf-8"?>
-<p:sld xmlns:p="http://schemas.openxmlformats.org/presentationml/2006/main">
+<p:sld xmlns:r="http://schemas.openxmlformats.org/officeDocument/2006/relationships" xmlns:a="http://schemas.openxmlformats.org/drawingml/2006/main" xmlns:p="http://schemas.openxmlformats.org/presentationml/2006/main">
   <p:cSld>
     <p:spTree>
       <p:nvGrpSpPr>
@@ -250,161 +200,61 @@
           <a:p xmlns:a="http://schemas.openxmlformats.org/drawingml/2006/main">
             <a:r>
               <a:rPr lang="en-US" sz="4000"/>
-              <a:t>AIOffice M6 — Manual Check</a:t>
+              <a:t>Q4 Review</a:t>
             </a:r>
           </a:p>
         </p:txBody>
       </p:sp>
-    </p:spTree>
-  </p:cSld>
-  <p:clrMapOvr>
-    <a:masterClrMapping xmlns:a="http://schemas.openxmlformats.org/drawingml/2006/main"/>
-  </p:clrMapOvr>
-</p:sld>
-</file>
-
-<file path=ppt/slides/slide2.xml><?xml version="1.0" encoding="utf-8"?>
-<p:sld xmlns:p="http://schemas.openxmlformats.org/presentationml/2006/main">
-  <p:cSld>
-    <p:spTree>
-      <p:nvGrpSpPr>
-        <p:cNvPr id="1" name=""/>
-        <p:cNvGrpSpPr/>
-        <p:nvPr/>
-      </p:nvGrpSpPr>
-      <p:grpSpPr>
-        <a:xfrm xmlns:a="http://schemas.openxmlformats.org/drawingml/2006/main"/>
-      </p:grpSpPr>
       <p:sp>
         <p:nvSpPr>
-          <p:cNvPr id="2" name="Title"/>
-          <p:cNvSpPr>
-            <a:spLocks xmlns:a="http://schemas.openxmlformats.org/drawingml/2006/main" noGrp="1"/>
-          </p:cNvSpPr>
-          <p:nvPr>
-            <p:ph type="title"/>
-          </p:nvPr>
+          <p:cNvPr id="3" name="TextBox 3"/>
+          <p:cNvSpPr txBox="1"/>
+          <p:nvPr/>
         </p:nvSpPr>
         <p:spPr>
-          <a:xfrm xmlns:a="http://schemas.openxmlformats.org/drawingml/2006/main">
-            <a:off x="831850" y="365125"/>
-            <a:ext cx="10515600" cy="1325563"/>
+          <a:xfrm>
+            <a:off x="720000" y="2880000"/>
+            <a:ext cx="5760000" cy="1080000"/>
           </a:xfrm>
-          <a:prstGeom xmlns:a="http://schemas.openxmlformats.org/drawingml/2006/main" prst="rect">
+          <a:prstGeom prst="rect">
             <a:avLst/>
           </a:prstGeom>
         </p:spPr>
         <p:txBody>
-          <a:bodyPr xmlns:a="http://schemas.openxmlformats.org/drawingml/2006/main"/>
-          <a:lstStyle xmlns:a="http://schemas.openxmlformats.org/drawingml/2006/main"/>
-          <a:p xmlns:a="http://schemas.openxmlformats.org/drawingml/2006/main">
+          <a:bodyPr wrap="square"/>
+          <a:lstStyle/>
+          <a:p>
             <a:r>
-              <a:rPr lang="en-US" sz="4000"/>
-              <a:t>Body slide A</a:t>
+              <a:rPr lang="en-US" sz="2400"/>
+              <a:t>Revenue up 12%</a:t>
             </a:r>
           </a:p>
         </p:txBody>
       </p:sp>
-    </p:spTree>
-  </p:cSld>
-  <p:clrMapOvr>
-    <a:masterClrMapping xmlns:a="http://schemas.openxmlformats.org/drawingml/2006/main"/>
-  </p:clrMapOvr>
-</p:sld>
-</file>
-
-<file path=ppt/slides/slide3.xml><?xml version="1.0" encoding="utf-8"?>
-<p:sld xmlns:p="http://schemas.openxmlformats.org/presentationml/2006/main">
-  <p:cSld>
-    <p:spTree>
-      <p:nvGrpSpPr>
-        <p:cNvPr id="1" name=""/>
-        <p:cNvGrpSpPr/>
-        <p:nvPr/>
-      </p:nvGrpSpPr>
-      <p:grpSpPr>
-        <a:xfrm xmlns:a="http://schemas.openxmlformats.org/drawingml/2006/main"/>
-      </p:grpSpPr>
-      <p:sp>
-        <p:nvSpPr>
-          <p:cNvPr id="2" name="Title"/>
-          <p:cNvSpPr>
-            <a:spLocks xmlns:a="http://schemas.openxmlformats.org/drawingml/2006/main" noGrp="1"/>
-          </p:cNvSpPr>
-          <p:nvPr>
-            <p:ph type="title"/>
-          </p:nvPr>
-        </p:nvSpPr>
+      <p:pic>
+        <p:nvPicPr>
+          <p:cNvPr id="4" name="pic.png" descr="Brand mark, blue square"/>
+          <p:cNvPicPr>
+            <a:picLocks noChangeAspect="1"/>
+          </p:cNvPicPr>
+          <p:nvPr/>
+        </p:nvPicPr>
+        <p:blipFill>
+          <a:blip xmlns:r="http://schemas.openxmlformats.org/officeDocument/2006/relationships" r:embed="Rf8305426f2314d92"/>
+          <a:stretch>
+            <a:fillRect/>
+          </a:stretch>
+        </p:blipFill>
         <p:spPr>
-          <a:xfrm xmlns:a="http://schemas.openxmlformats.org/drawingml/2006/main">
-            <a:off x="831850" y="365125"/>
-            <a:ext cx="10515600" cy="1325563"/>
+          <a:xfrm>
+            <a:off x="720000" y="720000"/>
+            <a:ext cx="1080000" cy="1080000"/>
           </a:xfrm>
-          <a:prstGeom xmlns:a="http://schemas.openxmlformats.org/drawingml/2006/main" prst="rect">
+          <a:prstGeom prst="rect">
             <a:avLst/>
           </a:prstGeom>
         </p:spPr>
-        <p:txBody>
-          <a:bodyPr xmlns:a="http://schemas.openxmlformats.org/drawingml/2006/main"/>
-          <a:lstStyle xmlns:a="http://schemas.openxmlformats.org/drawingml/2006/main"/>
-          <a:p xmlns:a="http://schemas.openxmlformats.org/drawingml/2006/main">
-            <a:r>
-              <a:rPr lang="en-US" sz="4000"/>
-              <a:t>Body slide B</a:t>
-            </a:r>
-          </a:p>
-        </p:txBody>
-      </p:sp>
-    </p:spTree>
-  </p:cSld>
-  <p:clrMapOvr>
-    <a:masterClrMapping xmlns:a="http://schemas.openxmlformats.org/drawingml/2006/main"/>
-  </p:clrMapOvr>
-</p:sld>
-</file>
-
-<file path=ppt/slides/slide4.xml><?xml version="1.0" encoding="utf-8"?>
-<p:sld xmlns:p="http://schemas.openxmlformats.org/presentationml/2006/main">
-  <p:cSld>
-    <p:spTree>
-      <p:nvGrpSpPr>
-        <p:cNvPr id="1" name=""/>
-        <p:cNvGrpSpPr/>
-        <p:nvPr/>
-      </p:nvGrpSpPr>
-      <p:grpSpPr>
-        <a:xfrm xmlns:a="http://schemas.openxmlformats.org/drawingml/2006/main"/>
-      </p:grpSpPr>
-      <p:sp>
-        <p:nvSpPr>
-          <p:cNvPr id="2" name="Title"/>
-          <p:cNvSpPr>
-            <a:spLocks xmlns:a="http://schemas.openxmlformats.org/drawingml/2006/main" noGrp="1"/>
-          </p:cNvSpPr>
-          <p:nvPr>
-            <p:ph type="title"/>
-          </p:nvPr>
-        </p:nvSpPr>
-        <p:spPr>
-          <a:xfrm xmlns:a="http://schemas.openxmlformats.org/drawingml/2006/main">
-            <a:off x="831850" y="365125"/>
-            <a:ext cx="10515600" cy="1325563"/>
-          </a:xfrm>
-          <a:prstGeom xmlns:a="http://schemas.openxmlformats.org/drawingml/2006/main" prst="rect">
-            <a:avLst/>
-          </a:prstGeom>
-        </p:spPr>
-        <p:txBody>
-          <a:bodyPr xmlns:a="http://schemas.openxmlformats.org/drawingml/2006/main"/>
-          <a:lstStyle xmlns:a="http://schemas.openxmlformats.org/drawingml/2006/main"/>
-          <a:p xmlns:a="http://schemas.openxmlformats.org/drawingml/2006/main">
-            <a:r>
-              <a:rPr lang="en-US" sz="4000"/>
-              <a:t>Uses cloned layout</a:t>
-            </a:r>
-          </a:p>
-        </p:txBody>
-      </p:sp>
+      </p:pic>
     </p:spTree>
   </p:cSld>
   <p:clrMapOvr>
